--- a/public/poster.pptx
+++ b/public/poster.pptx
@@ -3670,7 +3670,7 @@
         </p:nvGrpSpPr>
         <p:grpSpPr>
           <a:xfrm rot="0">
-            <a:off x="1715452" y="680085"/>
+            <a:off x="2070935" y="811968"/>
             <a:ext cx="16568738" cy="14170343"/>
             <a:chOff x="0" y="0"/>
             <a:chExt cx="22091650" cy="18893790"/>
@@ -5293,7 +5293,7 @@
             </a:custGeom>
             <a:solidFill>
               <a:srgbClr val="A36817">
-                <a:alpha val="14902"/>
+                <a:alpha val="45882"/>
               </a:srgbClr>
             </a:solidFill>
             <a:ln cap="sq">
@@ -5312,10 +5312,10 @@
         </p:nvGrpSpPr>
         <p:grpSpPr>
           <a:xfrm rot="0">
-            <a:off x="13898505" y="791425"/>
-            <a:ext cx="5198236" cy="4968976"/>
+            <a:off x="14038990" y="811968"/>
+            <a:ext cx="4917265" cy="4968976"/>
             <a:chOff x="0" y="0"/>
-            <a:chExt cx="565959" cy="540998"/>
+            <a:chExt cx="535368" cy="540998"/>
           </a:xfrm>
         </p:grpSpPr>
         <p:sp>
@@ -5327,7 +5327,7 @@
           <p:spPr>
             <a:xfrm flipH="false" flipV="false" rot="0">
               <a:off x="0" y="0"/>
-              <a:ext cx="565959" cy="540998"/>
+              <a:ext cx="535368" cy="540998"/>
             </a:xfrm>
             <a:custGeom>
               <a:avLst/>
@@ -5336,56 +5336,41 @@
               <a:cxnLst/>
               <a:rect r="r" b="b" t="t" l="l"/>
               <a:pathLst>
-                <a:path h="540998" w="565959">
+                <a:path h="540998" w="535368">
                   <a:moveTo>
-                    <a:pt x="32765" y="0"/>
+                    <a:pt x="34638" y="0"/>
                   </a:moveTo>
                   <a:lnTo>
-                    <a:pt x="533193" y="0"/>
+                    <a:pt x="500730" y="0"/>
                   </a:lnTo>
                   <a:cubicBezTo>
-                    <a:pt x="551289" y="0"/>
-                    <a:pt x="565959" y="14670"/>
-                    <a:pt x="565959" y="32765"/>
+                    <a:pt x="519860" y="0"/>
+                    <a:pt x="535368" y="15508"/>
+                    <a:pt x="535368" y="34638"/>
                   </a:cubicBezTo>
                   <a:lnTo>
-                    <a:pt x="565959" y="508232"/>
+                    <a:pt x="535368" y="506360"/>
                   </a:lnTo>
                   <a:cubicBezTo>
-                    <a:pt x="565959" y="516922"/>
-                    <a:pt x="562506" y="525256"/>
-                    <a:pt x="556362" y="531401"/>
-                  </a:cubicBezTo>
-                  <a:cubicBezTo>
-                    <a:pt x="550217" y="537546"/>
-                    <a:pt x="541883" y="540998"/>
-                    <a:pt x="533193" y="540998"/>
+                    <a:pt x="535368" y="525490"/>
+                    <a:pt x="519860" y="540998"/>
+                    <a:pt x="500730" y="540998"/>
                   </a:cubicBezTo>
                   <a:lnTo>
-                    <a:pt x="32765" y="540998"/>
+                    <a:pt x="34638" y="540998"/>
                   </a:lnTo>
                   <a:cubicBezTo>
-                    <a:pt x="24075" y="540998"/>
-                    <a:pt x="15741" y="537546"/>
-                    <a:pt x="9597" y="531401"/>
-                  </a:cubicBezTo>
-                  <a:cubicBezTo>
-                    <a:pt x="3452" y="525256"/>
-                    <a:pt x="0" y="516922"/>
-                    <a:pt x="0" y="508232"/>
+                    <a:pt x="15508" y="540998"/>
+                    <a:pt x="0" y="525490"/>
+                    <a:pt x="0" y="506360"/>
                   </a:cubicBezTo>
                   <a:lnTo>
-                    <a:pt x="0" y="32765"/>
+                    <a:pt x="0" y="34638"/>
                   </a:lnTo>
                   <a:cubicBezTo>
-                    <a:pt x="0" y="24075"/>
-                    <a:pt x="3452" y="15741"/>
-                    <a:pt x="9597" y="9597"/>
-                  </a:cubicBezTo>
-                  <a:cubicBezTo>
-                    <a:pt x="15741" y="3452"/>
-                    <a:pt x="24075" y="0"/>
-                    <a:pt x="32765" y="0"/>
+                    <a:pt x="0" y="15508"/>
+                    <a:pt x="15508" y="0"/>
+                    <a:pt x="34638" y="0"/>
                   </a:cubicBezTo>
                   <a:close/>
                 </a:path>
@@ -5405,7 +5390,7 @@
           <p:spPr>
             <a:xfrm>
               <a:off x="0" y="-85725"/>
-              <a:ext cx="565959" cy="626723"/>
+              <a:ext cx="535368" cy="626723"/>
             </a:xfrm>
             <a:prstGeom prst="rect">
               <a:avLst/>
@@ -5432,10 +5417,10 @@
         </p:nvGrpSpPr>
         <p:grpSpPr>
           <a:xfrm rot="0">
-            <a:off x="8418651" y="791425"/>
-            <a:ext cx="5198236" cy="4968976"/>
+            <a:off x="8996680" y="811968"/>
+            <a:ext cx="4917265" cy="4968976"/>
             <a:chOff x="0" y="0"/>
-            <a:chExt cx="565959" cy="540998"/>
+            <a:chExt cx="535368" cy="540998"/>
           </a:xfrm>
         </p:grpSpPr>
         <p:sp>
@@ -5447,7 +5432,7 @@
           <p:spPr>
             <a:xfrm flipH="false" flipV="false" rot="0">
               <a:off x="0" y="0"/>
-              <a:ext cx="565959" cy="540998"/>
+              <a:ext cx="535368" cy="540998"/>
             </a:xfrm>
             <a:custGeom>
               <a:avLst/>
@@ -5456,56 +5441,41 @@
               <a:cxnLst/>
               <a:rect r="r" b="b" t="t" l="l"/>
               <a:pathLst>
-                <a:path h="540998" w="565959">
+                <a:path h="540998" w="535368">
                   <a:moveTo>
-                    <a:pt x="32765" y="0"/>
+                    <a:pt x="34638" y="0"/>
                   </a:moveTo>
                   <a:lnTo>
-                    <a:pt x="533193" y="0"/>
+                    <a:pt x="500730" y="0"/>
                   </a:lnTo>
                   <a:cubicBezTo>
-                    <a:pt x="551289" y="0"/>
-                    <a:pt x="565959" y="14670"/>
-                    <a:pt x="565959" y="32765"/>
+                    <a:pt x="519860" y="0"/>
+                    <a:pt x="535368" y="15508"/>
+                    <a:pt x="535368" y="34638"/>
                   </a:cubicBezTo>
                   <a:lnTo>
-                    <a:pt x="565959" y="508232"/>
+                    <a:pt x="535368" y="506360"/>
                   </a:lnTo>
                   <a:cubicBezTo>
-                    <a:pt x="565959" y="516922"/>
-                    <a:pt x="562506" y="525256"/>
-                    <a:pt x="556362" y="531401"/>
-                  </a:cubicBezTo>
-                  <a:cubicBezTo>
-                    <a:pt x="550217" y="537546"/>
-                    <a:pt x="541883" y="540998"/>
-                    <a:pt x="533193" y="540998"/>
+                    <a:pt x="535368" y="525490"/>
+                    <a:pt x="519860" y="540998"/>
+                    <a:pt x="500730" y="540998"/>
                   </a:cubicBezTo>
                   <a:lnTo>
-                    <a:pt x="32765" y="540998"/>
+                    <a:pt x="34638" y="540998"/>
                   </a:lnTo>
                   <a:cubicBezTo>
-                    <a:pt x="24075" y="540998"/>
-                    <a:pt x="15741" y="537546"/>
-                    <a:pt x="9597" y="531401"/>
-                  </a:cubicBezTo>
-                  <a:cubicBezTo>
-                    <a:pt x="3452" y="525256"/>
-                    <a:pt x="0" y="516922"/>
-                    <a:pt x="0" y="508232"/>
+                    <a:pt x="15508" y="540998"/>
+                    <a:pt x="0" y="525490"/>
+                    <a:pt x="0" y="506360"/>
                   </a:cubicBezTo>
                   <a:lnTo>
-                    <a:pt x="0" y="32765"/>
+                    <a:pt x="0" y="34638"/>
                   </a:lnTo>
                   <a:cubicBezTo>
-                    <a:pt x="0" y="24075"/>
-                    <a:pt x="3452" y="15741"/>
-                    <a:pt x="9597" y="9597"/>
-                  </a:cubicBezTo>
-                  <a:cubicBezTo>
-                    <a:pt x="15741" y="3452"/>
-                    <a:pt x="24075" y="0"/>
-                    <a:pt x="32765" y="0"/>
+                    <a:pt x="0" y="15508"/>
+                    <a:pt x="15508" y="0"/>
+                    <a:pt x="34638" y="0"/>
                   </a:cubicBezTo>
                   <a:close/>
                 </a:path>
@@ -5525,7 +5495,7 @@
           <p:spPr>
             <a:xfrm>
               <a:off x="0" y="-85725"/>
-              <a:ext cx="565959" cy="626723"/>
+              <a:ext cx="535368" cy="626723"/>
             </a:xfrm>
             <a:prstGeom prst="rect">
               <a:avLst/>
@@ -5635,7 +5605,7 @@
                 <a:t>Eva T., Maimuna M., Sunny S. | CS 147 Autumn 2025 | </a:t>
               </a:r>
               <a:r>
-                <a:rPr lang="en-US" sz="2896" spc="-72">
+                <a:rPr lang="en-US" sz="2896" spc="-72" u="sng">
                   <a:solidFill>
                     <a:srgbClr val="EDF0E8"/>
                   </a:solidFill>
@@ -5644,82 +5614,36 @@
                   <a:cs typeface="Glacial Indifference"/>
                   <a:sym typeface="Glacial Indifference"/>
                 </a:rPr>
-                <a:t>https://web.stanford.edu/class/cs147/projects/DesignforCommunityResilience/Stitch/#/</a:t>
+                <a:t>hci.stanford.edu/courses/cs147/2025/au/projects/DesignforCommunityResilience/Stitch/</a:t>
               </a:r>
             </a:p>
           </p:txBody>
         </p:sp>
       </p:grpSp>
-      <p:sp>
-        <p:nvSpPr>
-          <p:cNvPr name="Freeform 16" id="16"/>
-          <p:cNvSpPr/>
-          <p:nvPr/>
-        </p:nvSpPr>
-        <p:spPr>
-          <a:xfrm flipH="false" flipV="false" rot="0">
-            <a:off x="3637688" y="20175003"/>
-            <a:ext cx="2915429" cy="3308269"/>
-          </a:xfrm>
-          <a:custGeom>
-            <a:avLst/>
-            <a:gdLst/>
-            <a:ahLst/>
-            <a:cxnLst/>
-            <a:rect r="r" b="b" t="t" l="l"/>
-            <a:pathLst>
-              <a:path h="3308269" w="2915429">
-                <a:moveTo>
-                  <a:pt x="0" y="0"/>
-                </a:moveTo>
-                <a:lnTo>
-                  <a:pt x="2915429" y="0"/>
-                </a:lnTo>
-                <a:lnTo>
-                  <a:pt x="2915429" y="3308268"/>
-                </a:lnTo>
-                <a:lnTo>
-                  <a:pt x="0" y="3308268"/>
-                </a:lnTo>
-                <a:lnTo>
-                  <a:pt x="0" y="0"/>
-                </a:lnTo>
-                <a:close/>
-              </a:path>
-            </a:pathLst>
-          </a:custGeom>
-          <a:blipFill>
-            <a:blip r:embed="rId3"/>
-            <a:stretch>
-              <a:fillRect l="0" t="0" r="-47849" b="0"/>
-            </a:stretch>
-          </a:blipFill>
-        </p:spPr>
-      </p:sp>
       <p:grpSp>
         <p:nvGrpSpPr>
-          <p:cNvPr name="Group 17" id="17"/>
+          <p:cNvPr name="Group 16" id="16"/>
           <p:cNvGrpSpPr/>
           <p:nvPr/>
         </p:nvGrpSpPr>
         <p:grpSpPr>
           <a:xfrm rot="0">
-            <a:off x="10498000" y="20175003"/>
-            <a:ext cx="2913340" cy="3782869"/>
+            <a:off x="716623" y="18826363"/>
+            <a:ext cx="18683554" cy="4384669"/>
             <a:chOff x="0" y="0"/>
-            <a:chExt cx="3884453" cy="5043826"/>
+            <a:chExt cx="24911406" cy="5846225"/>
           </a:xfrm>
         </p:grpSpPr>
         <p:sp>
           <p:nvSpPr>
-            <p:cNvPr name="Freeform 18" id="18"/>
+            <p:cNvPr name="Freeform 17" id="17"/>
             <p:cNvSpPr/>
             <p:nvPr/>
           </p:nvSpPr>
           <p:spPr>
             <a:xfrm flipH="false" flipV="false" rot="0">
-              <a:off x="0" y="0"/>
-              <a:ext cx="2308663" cy="4398708"/>
+              <a:off x="4511547" y="205499"/>
+              <a:ext cx="3887239" cy="4411025"/>
             </a:xfrm>
             <a:custGeom>
               <a:avLst/>
@@ -5728,18 +5652,18 @@
               <a:cxnLst/>
               <a:rect r="r" b="b" t="t" l="l"/>
               <a:pathLst>
-                <a:path h="4398708" w="2308663">
+                <a:path h="4411025" w="3887239">
                   <a:moveTo>
                     <a:pt x="0" y="0"/>
                   </a:moveTo>
                   <a:lnTo>
-                    <a:pt x="2308663" y="0"/>
+                    <a:pt x="3887239" y="0"/>
                   </a:lnTo>
                   <a:lnTo>
-                    <a:pt x="2308663" y="4398708"/>
+                    <a:pt x="3887239" y="4411025"/>
                   </a:lnTo>
                   <a:lnTo>
-                    <a:pt x="0" y="4398708"/>
+                    <a:pt x="0" y="4411025"/>
                   </a:lnTo>
                   <a:lnTo>
                     <a:pt x="0" y="0"/>
@@ -5749,22 +5673,29 @@
               </a:pathLst>
             </a:custGeom>
             <a:blipFill>
-              <a:blip r:embed="rId4"/>
+              <a:blip r:embed="rId3"/>
               <a:stretch>
-                <a:fillRect l="0" t="0" r="-215157" b="-280"/>
+                <a:fillRect l="0" t="0" r="-47849" b="0"/>
               </a:stretch>
             </a:blipFill>
+            <a:ln w="9525" cap="sq">
+              <a:solidFill>
+                <a:srgbClr val="000000"/>
+              </a:solidFill>
+              <a:prstDash val="solid"/>
+              <a:miter/>
+            </a:ln>
           </p:spPr>
         </p:sp>
         <p:sp>
           <p:nvSpPr>
-            <p:cNvPr name="Freeform 19" id="19"/>
+            <p:cNvPr name="Freeform 18" id="18"/>
             <p:cNvSpPr/>
             <p:nvPr/>
           </p:nvSpPr>
           <p:spPr>
             <a:xfrm flipH="false" flipV="false" rot="0">
-              <a:off x="1575791" y="645118"/>
+              <a:off x="13063670" y="205499"/>
               <a:ext cx="2308663" cy="4398708"/>
             </a:xfrm>
             <a:custGeom>
@@ -5782,10 +5713,63 @@
                     <a:pt x="2308662" y="0"/>
                   </a:lnTo>
                   <a:lnTo>
-                    <a:pt x="2308662" y="4398708"/>
+                    <a:pt x="2308662" y="4398707"/>
                   </a:lnTo>
                   <a:lnTo>
-                    <a:pt x="0" y="4398708"/>
+                    <a:pt x="0" y="4398707"/>
+                  </a:lnTo>
+                  <a:lnTo>
+                    <a:pt x="0" y="0"/>
+                  </a:lnTo>
+                  <a:close/>
+                </a:path>
+              </a:pathLst>
+            </a:custGeom>
+            <a:blipFill>
+              <a:blip r:embed="rId4"/>
+              <a:stretch>
+                <a:fillRect l="0" t="0" r="-215157" b="-280"/>
+              </a:stretch>
+            </a:blipFill>
+            <a:ln w="9525" cap="sq">
+              <a:solidFill>
+                <a:srgbClr val="000000"/>
+              </a:solidFill>
+              <a:prstDash val="solid"/>
+              <a:miter/>
+            </a:ln>
+          </p:spPr>
+        </p:sp>
+        <p:sp>
+          <p:nvSpPr>
+            <p:cNvPr name="Freeform 19" id="19"/>
+            <p:cNvSpPr/>
+            <p:nvPr/>
+          </p:nvSpPr>
+          <p:spPr>
+            <a:xfrm flipH="false" flipV="false" rot="0">
+              <a:off x="14639461" y="850617"/>
+              <a:ext cx="2308663" cy="4398708"/>
+            </a:xfrm>
+            <a:custGeom>
+              <a:avLst/>
+              <a:gdLst/>
+              <a:ahLst/>
+              <a:cxnLst/>
+              <a:rect r="r" b="b" t="t" l="l"/>
+              <a:pathLst>
+                <a:path h="4398708" w="2308663">
+                  <a:moveTo>
+                    <a:pt x="0" y="0"/>
+                  </a:moveTo>
+                  <a:lnTo>
+                    <a:pt x="2308662" y="0"/>
+                  </a:lnTo>
+                  <a:lnTo>
+                    <a:pt x="2308662" y="4398707"/>
+                  </a:lnTo>
+                  <a:lnTo>
+                    <a:pt x="0" y="4398707"/>
                   </a:lnTo>
                   <a:lnTo>
                     <a:pt x="0" y="0"/>
@@ -5800,33 +5784,25 @@
                 <a:fillRect l="-211473" t="-280" r="-3683" b="0"/>
               </a:stretch>
             </a:blipFill>
+            <a:ln w="9525" cap="sq">
+              <a:solidFill>
+                <a:srgbClr val="000000"/>
+              </a:solidFill>
+              <a:prstDash val="solid"/>
+              <a:miter/>
+            </a:ln>
           </p:spPr>
         </p:sp>
-      </p:grpSp>
-      <p:grpSp>
-        <p:nvGrpSpPr>
-          <p:cNvPr name="Group 20" id="20"/>
-          <p:cNvGrpSpPr/>
-          <p:nvPr/>
-        </p:nvGrpSpPr>
-        <p:grpSpPr>
-          <a:xfrm rot="0">
-            <a:off x="16665453" y="19916104"/>
-            <a:ext cx="2392657" cy="3911744"/>
-            <a:chOff x="0" y="0"/>
-            <a:chExt cx="3190209" cy="5215659"/>
-          </a:xfrm>
-        </p:grpSpPr>
         <p:sp>
           <p:nvSpPr>
-            <p:cNvPr name="Freeform 21" id="21"/>
+            <p:cNvPr name="Freeform 20" id="20"/>
             <p:cNvSpPr/>
             <p:nvPr/>
           </p:nvSpPr>
           <p:spPr>
             <a:xfrm flipH="false" flipV="false" rot="0">
-              <a:off x="0" y="0"/>
-              <a:ext cx="2372991" cy="4566007"/>
+              <a:off x="21846174" y="129166"/>
+              <a:ext cx="2250664" cy="4330631"/>
             </a:xfrm>
             <a:custGeom>
               <a:avLst/>
@@ -5835,18 +5811,18 @@
               <a:cxnLst/>
               <a:rect r="r" b="b" t="t" l="l"/>
               <a:pathLst>
-                <a:path h="4566007" w="2372991">
+                <a:path h="4330631" w="2250664">
                   <a:moveTo>
                     <a:pt x="0" y="0"/>
                   </a:moveTo>
                   <a:lnTo>
-                    <a:pt x="2372991" y="0"/>
+                    <a:pt x="2250664" y="0"/>
                   </a:lnTo>
                   <a:lnTo>
-                    <a:pt x="2372991" y="4566007"/>
+                    <a:pt x="2250664" y="4330630"/>
                   </a:lnTo>
                   <a:lnTo>
-                    <a:pt x="0" y="4566007"/>
+                    <a:pt x="0" y="4330630"/>
                   </a:lnTo>
                   <a:lnTo>
                     <a:pt x="0" y="0"/>
@@ -5865,14 +5841,14 @@
         </p:sp>
         <p:sp>
           <p:nvSpPr>
-            <p:cNvPr name="Freeform 22" id="22"/>
+            <p:cNvPr name="Freeform 21" id="21"/>
             <p:cNvSpPr/>
             <p:nvPr/>
           </p:nvSpPr>
           <p:spPr>
             <a:xfrm flipH="false" flipV="false" rot="0">
-              <a:off x="835825" y="804634"/>
-              <a:ext cx="2354385" cy="4411025"/>
+              <a:off x="22638912" y="892321"/>
+              <a:ext cx="2233017" cy="4183638"/>
             </a:xfrm>
             <a:custGeom>
               <a:avLst/>
@@ -5881,18 +5857,18 @@
               <a:cxnLst/>
               <a:rect r="r" b="b" t="t" l="l"/>
               <a:pathLst>
-                <a:path h="4411025" w="2354385">
+                <a:path h="4183638" w="2233017">
                   <a:moveTo>
                     <a:pt x="0" y="0"/>
                   </a:moveTo>
                   <a:lnTo>
-                    <a:pt x="2354384" y="0"/>
+                    <a:pt x="2233017" y="0"/>
                   </a:lnTo>
                   <a:lnTo>
-                    <a:pt x="2354384" y="4411025"/>
+                    <a:pt x="2233017" y="4183638"/>
                   </a:lnTo>
                   <a:lnTo>
-                    <a:pt x="0" y="4411025"/>
+                    <a:pt x="0" y="4183638"/>
                   </a:lnTo>
                   <a:lnTo>
                     <a:pt x="0" y="0"/>
@@ -5909,17 +5885,435 @@
             </a:blipFill>
           </p:spPr>
         </p:sp>
+        <p:sp>
+          <p:nvSpPr>
+            <p:cNvPr name="Freeform 22" id="22"/>
+            <p:cNvSpPr/>
+            <p:nvPr/>
+          </p:nvSpPr>
+          <p:spPr>
+            <a:xfrm flipH="false" flipV="false" rot="0">
+              <a:off x="205208" y="129166"/>
+              <a:ext cx="3887239" cy="4411025"/>
+            </a:xfrm>
+            <a:custGeom>
+              <a:avLst/>
+              <a:gdLst/>
+              <a:ahLst/>
+              <a:cxnLst/>
+              <a:rect r="r" b="b" t="t" l="l"/>
+              <a:pathLst>
+                <a:path h="4411025" w="3887239">
+                  <a:moveTo>
+                    <a:pt x="0" y="0"/>
+                  </a:moveTo>
+                  <a:lnTo>
+                    <a:pt x="3887239" y="0"/>
+                  </a:lnTo>
+                  <a:lnTo>
+                    <a:pt x="3887239" y="4411024"/>
+                  </a:lnTo>
+                  <a:lnTo>
+                    <a:pt x="0" y="4411024"/>
+                  </a:lnTo>
+                  <a:lnTo>
+                    <a:pt x="0" y="0"/>
+                  </a:lnTo>
+                  <a:close/>
+                </a:path>
+              </a:pathLst>
+            </a:custGeom>
+            <a:blipFill>
+              <a:blip r:embed="rId7"/>
+              <a:stretch>
+                <a:fillRect l="-14274" t="-352" r="0" b="-352"/>
+              </a:stretch>
+            </a:blipFill>
+            <a:ln w="9525" cap="sq">
+              <a:solidFill>
+                <a:srgbClr val="000000"/>
+              </a:solidFill>
+              <a:prstDash val="solid"/>
+              <a:miter/>
+            </a:ln>
+          </p:spPr>
+        </p:sp>
+        <p:sp>
+          <p:nvSpPr>
+            <p:cNvPr name="Freeform 23" id="23"/>
+            <p:cNvSpPr/>
+            <p:nvPr/>
+          </p:nvSpPr>
+          <p:spPr>
+            <a:xfrm flipH="false" flipV="false" rot="0">
+              <a:off x="8823358" y="205499"/>
+              <a:ext cx="3815740" cy="4373341"/>
+            </a:xfrm>
+            <a:custGeom>
+              <a:avLst/>
+              <a:gdLst/>
+              <a:ahLst/>
+              <a:cxnLst/>
+              <a:rect r="r" b="b" t="t" l="l"/>
+              <a:pathLst>
+                <a:path h="4373341" w="3815740">
+                  <a:moveTo>
+                    <a:pt x="0" y="0"/>
+                  </a:moveTo>
+                  <a:lnTo>
+                    <a:pt x="3815740" y="0"/>
+                  </a:lnTo>
+                  <a:lnTo>
+                    <a:pt x="3815740" y="4373341"/>
+                  </a:lnTo>
+                  <a:lnTo>
+                    <a:pt x="0" y="4373341"/>
+                  </a:lnTo>
+                  <a:lnTo>
+                    <a:pt x="0" y="0"/>
+                  </a:lnTo>
+                  <a:close/>
+                </a:path>
+              </a:pathLst>
+            </a:custGeom>
+            <a:blipFill>
+              <a:blip r:embed="rId8"/>
+              <a:stretch>
+                <a:fillRect l="0" t="0" r="0" b="0"/>
+              </a:stretch>
+            </a:blipFill>
+            <a:ln cap="sq">
+              <a:noFill/>
+              <a:prstDash val="solid"/>
+              <a:miter/>
+            </a:ln>
+          </p:spPr>
+        </p:sp>
+        <p:sp>
+          <p:nvSpPr>
+            <p:cNvPr name="Freeform 24" id="24"/>
+            <p:cNvSpPr/>
+            <p:nvPr/>
+          </p:nvSpPr>
+          <p:spPr>
+            <a:xfrm flipH="false" flipV="false" rot="0">
+              <a:off x="17372695" y="0"/>
+              <a:ext cx="3884453" cy="4835333"/>
+            </a:xfrm>
+            <a:custGeom>
+              <a:avLst/>
+              <a:gdLst/>
+              <a:ahLst/>
+              <a:cxnLst/>
+              <a:rect r="r" b="b" t="t" l="l"/>
+              <a:pathLst>
+                <a:path h="4835333" w="3884453">
+                  <a:moveTo>
+                    <a:pt x="0" y="0"/>
+                  </a:moveTo>
+                  <a:lnTo>
+                    <a:pt x="3884453" y="0"/>
+                  </a:lnTo>
+                  <a:lnTo>
+                    <a:pt x="3884453" y="4835333"/>
+                  </a:lnTo>
+                  <a:lnTo>
+                    <a:pt x="0" y="4835333"/>
+                  </a:lnTo>
+                  <a:lnTo>
+                    <a:pt x="0" y="0"/>
+                  </a:lnTo>
+                  <a:close/>
+                </a:path>
+              </a:pathLst>
+            </a:custGeom>
+            <a:blipFill>
+              <a:blip r:embed="rId9"/>
+              <a:stretch>
+                <a:fillRect l="0" t="-4097" r="0" b="-4097"/>
+              </a:stretch>
+            </a:blipFill>
+            <a:ln w="9525" cap="sq">
+              <a:solidFill>
+                <a:srgbClr val="000000"/>
+              </a:solidFill>
+              <a:prstDash val="solid"/>
+              <a:miter/>
+            </a:ln>
+          </p:spPr>
+        </p:sp>
+        <p:sp>
+          <p:nvSpPr>
+            <p:cNvPr name="TextBox 25" id="25"/>
+            <p:cNvSpPr txBox="true"/>
+            <p:nvPr/>
+          </p:nvSpPr>
+          <p:spPr>
+            <a:xfrm rot="0">
+              <a:off x="0" y="5170317"/>
+              <a:ext cx="3613745" cy="654051"/>
+            </a:xfrm>
+            <a:prstGeom prst="rect">
+              <a:avLst/>
+            </a:prstGeom>
+          </p:spPr>
+          <p:txBody>
+            <a:bodyPr anchor="t" rtlCol="false" tIns="0" lIns="0" bIns="0" rIns="0">
+              <a:spAutoFit/>
+            </a:bodyPr>
+            <a:lstStyle/>
+            <a:p>
+              <a:pPr algn="ctr">
+                <a:lnSpc>
+                  <a:spcPts val="4199"/>
+                </a:lnSpc>
+                <a:spcBef>
+                  <a:spcPct val="0"/>
+                </a:spcBef>
+              </a:pPr>
+              <a:r>
+                <a:rPr lang="en-US" b="true" sz="2999" spc="-74">
+                  <a:solidFill>
+                    <a:srgbClr val="A36817"/>
+                  </a:solidFill>
+                  <a:latin typeface="Glacial Indifference Bold"/>
+                  <a:ea typeface="Glacial Indifference Bold"/>
+                  <a:cs typeface="Glacial Indifference Bold"/>
+                  <a:sym typeface="Glacial Indifference Bold"/>
+                </a:rPr>
+                <a:t>Needfinding</a:t>
+              </a:r>
+            </a:p>
+          </p:txBody>
+        </p:sp>
+        <p:sp>
+          <p:nvSpPr>
+            <p:cNvPr name="TextBox 26" id="26"/>
+            <p:cNvSpPr txBox="true"/>
+            <p:nvPr/>
+          </p:nvSpPr>
+          <p:spPr>
+            <a:xfrm rot="0">
+              <a:off x="4425144" y="5192174"/>
+              <a:ext cx="4060044" cy="654051"/>
+            </a:xfrm>
+            <a:prstGeom prst="rect">
+              <a:avLst/>
+            </a:prstGeom>
+          </p:spPr>
+          <p:txBody>
+            <a:bodyPr anchor="t" rtlCol="false" tIns="0" lIns="0" bIns="0" rIns="0">
+              <a:spAutoFit/>
+            </a:bodyPr>
+            <a:lstStyle/>
+            <a:p>
+              <a:pPr algn="ctr">
+                <a:lnSpc>
+                  <a:spcPts val="4199"/>
+                </a:lnSpc>
+                <a:spcBef>
+                  <a:spcPct val="0"/>
+                </a:spcBef>
+              </a:pPr>
+              <a:r>
+                <a:rPr lang="en-US" b="true" sz="2999" spc="-74">
+                  <a:solidFill>
+                    <a:srgbClr val="A36817"/>
+                  </a:solidFill>
+                  <a:latin typeface="Glacial Indifference Bold"/>
+                  <a:ea typeface="Glacial Indifference Bold"/>
+                  <a:cs typeface="Glacial Indifference Bold"/>
+                  <a:sym typeface="Glacial Indifference Bold"/>
+                </a:rPr>
+                <a:t>How Might We...</a:t>
+              </a:r>
+            </a:p>
+          </p:txBody>
+        </p:sp>
+        <p:sp>
+          <p:nvSpPr>
+            <p:cNvPr name="TextBox 27" id="27"/>
+            <p:cNvSpPr txBox="true"/>
+            <p:nvPr/>
+          </p:nvSpPr>
+          <p:spPr>
+            <a:xfrm rot="0">
+              <a:off x="8641549" y="5160157"/>
+              <a:ext cx="4179359" cy="664210"/>
+            </a:xfrm>
+            <a:prstGeom prst="rect">
+              <a:avLst/>
+            </a:prstGeom>
+          </p:spPr>
+          <p:txBody>
+            <a:bodyPr anchor="t" rtlCol="false" tIns="0" lIns="0" bIns="0" rIns="0">
+              <a:spAutoFit/>
+            </a:bodyPr>
+            <a:lstStyle/>
+            <a:p>
+              <a:pPr algn="ctr">
+                <a:lnSpc>
+                  <a:spcPts val="4139"/>
+                </a:lnSpc>
+              </a:pPr>
+              <a:r>
+                <a:rPr lang="en-US" b="true" sz="2999" spc="-188">
+                  <a:solidFill>
+                    <a:srgbClr val="A36817"/>
+                  </a:solidFill>
+                  <a:latin typeface="Glacial Indifference Bold"/>
+                  <a:ea typeface="Glacial Indifference Bold"/>
+                  <a:cs typeface="Glacial Indifference Bold"/>
+                  <a:sym typeface="Glacial Indifference Bold"/>
+                </a:rPr>
+                <a:t>Diverse Realizations</a:t>
+              </a:r>
+            </a:p>
+          </p:txBody>
+        </p:sp>
+        <p:sp>
+          <p:nvSpPr>
+            <p:cNvPr name="TextBox 28" id="28"/>
+            <p:cNvSpPr txBox="true"/>
+            <p:nvPr/>
+          </p:nvSpPr>
+          <p:spPr>
+            <a:xfrm rot="0">
+              <a:off x="13157720" y="5192174"/>
+              <a:ext cx="3982339" cy="654051"/>
+            </a:xfrm>
+            <a:prstGeom prst="rect">
+              <a:avLst/>
+            </a:prstGeom>
+          </p:spPr>
+          <p:txBody>
+            <a:bodyPr anchor="t" rtlCol="false" tIns="0" lIns="0" bIns="0" rIns="0">
+              <a:spAutoFit/>
+            </a:bodyPr>
+            <a:lstStyle/>
+            <a:p>
+              <a:pPr algn="ctr">
+                <a:lnSpc>
+                  <a:spcPts val="4199"/>
+                </a:lnSpc>
+                <a:spcBef>
+                  <a:spcPct val="0"/>
+                </a:spcBef>
+              </a:pPr>
+              <a:r>
+                <a:rPr lang="en-US" b="true" sz="2999" spc="-74">
+                  <a:solidFill>
+                    <a:srgbClr val="A36817"/>
+                  </a:solidFill>
+                  <a:latin typeface="Glacial Indifference Bold"/>
+                  <a:ea typeface="Glacial Indifference Bold"/>
+                  <a:cs typeface="Glacial Indifference Bold"/>
+                  <a:sym typeface="Glacial Indifference Bold"/>
+                </a:rPr>
+                <a:t>Low-fi Prototype</a:t>
+              </a:r>
+            </a:p>
+          </p:txBody>
+        </p:sp>
+        <p:sp>
+          <p:nvSpPr>
+            <p:cNvPr name="TextBox 29" id="29"/>
+            <p:cNvSpPr txBox="true"/>
+            <p:nvPr/>
+          </p:nvSpPr>
+          <p:spPr>
+            <a:xfrm rot="0">
+              <a:off x="17668309" y="5192174"/>
+              <a:ext cx="3293226" cy="654051"/>
+            </a:xfrm>
+            <a:prstGeom prst="rect">
+              <a:avLst/>
+            </a:prstGeom>
+          </p:spPr>
+          <p:txBody>
+            <a:bodyPr anchor="t" rtlCol="false" tIns="0" lIns="0" bIns="0" rIns="0">
+              <a:spAutoFit/>
+            </a:bodyPr>
+            <a:lstStyle/>
+            <a:p>
+              <a:pPr algn="ctr">
+                <a:lnSpc>
+                  <a:spcPts val="4199"/>
+                </a:lnSpc>
+                <a:spcBef>
+                  <a:spcPct val="0"/>
+                </a:spcBef>
+              </a:pPr>
+              <a:r>
+                <a:rPr lang="en-US" b="true" sz="2999" spc="-245">
+                  <a:solidFill>
+                    <a:srgbClr val="A36817"/>
+                  </a:solidFill>
+                  <a:latin typeface="Glacial Indifference Bold"/>
+                  <a:ea typeface="Glacial Indifference Bold"/>
+                  <a:cs typeface="Glacial Indifference Bold"/>
+                  <a:sym typeface="Glacial Indifference Bold"/>
+                </a:rPr>
+                <a:t>Usability Testing</a:t>
+              </a:r>
+            </a:p>
+          </p:txBody>
+        </p:sp>
+        <p:sp>
+          <p:nvSpPr>
+            <p:cNvPr name="TextBox 30" id="30"/>
+            <p:cNvSpPr txBox="true"/>
+            <p:nvPr/>
+          </p:nvSpPr>
+          <p:spPr>
+            <a:xfrm rot="0">
+              <a:off x="21618180" y="5170317"/>
+              <a:ext cx="3293226" cy="654051"/>
+            </a:xfrm>
+            <a:prstGeom prst="rect">
+              <a:avLst/>
+            </a:prstGeom>
+          </p:spPr>
+          <p:txBody>
+            <a:bodyPr anchor="t" rtlCol="false" tIns="0" lIns="0" bIns="0" rIns="0">
+              <a:spAutoFit/>
+            </a:bodyPr>
+            <a:lstStyle/>
+            <a:p>
+              <a:pPr algn="ctr">
+                <a:lnSpc>
+                  <a:spcPts val="4199"/>
+                </a:lnSpc>
+                <a:spcBef>
+                  <a:spcPct val="0"/>
+                </a:spcBef>
+              </a:pPr>
+              <a:r>
+                <a:rPr lang="en-US" b="true" sz="2999" spc="-290">
+                  <a:solidFill>
+                    <a:srgbClr val="A36817"/>
+                  </a:solidFill>
+                  <a:latin typeface="Glacial Indifference Bold"/>
+                  <a:ea typeface="Glacial Indifference Bold"/>
+                  <a:cs typeface="Glacial Indifference Bold"/>
+                  <a:sym typeface="Glacial Indifference Bold"/>
+                </a:rPr>
+                <a:t>Med-Fi Prototype</a:t>
+              </a:r>
+            </a:p>
+          </p:txBody>
+        </p:sp>
       </p:grpSp>
       <p:sp>
         <p:nvSpPr>
-          <p:cNvPr name="Freeform 23" id="23"/>
+          <p:cNvPr name="Freeform 31" id="31"/>
           <p:cNvSpPr/>
           <p:nvPr/>
         </p:nvSpPr>
         <p:spPr>
           <a:xfrm flipH="false" flipV="false" rot="0">
-            <a:off x="553965" y="20117753"/>
-            <a:ext cx="2915429" cy="3308269"/>
+            <a:off x="10524816" y="7991035"/>
+            <a:ext cx="3791780" cy="8243001"/>
           </a:xfrm>
           <a:custGeom>
             <a:avLst/>
@@ -5928,156 +6322,18 @@
             <a:cxnLst/>
             <a:rect r="r" b="b" t="t" l="l"/>
             <a:pathLst>
-              <a:path h="3308269" w="2915429">
+              <a:path h="8243001" w="3791780">
                 <a:moveTo>
                   <a:pt x="0" y="0"/>
                 </a:moveTo>
                 <a:lnTo>
-                  <a:pt x="2915430" y="0"/>
+                  <a:pt x="3791780" y="0"/>
                 </a:lnTo>
                 <a:lnTo>
-                  <a:pt x="2915430" y="3308268"/>
+                  <a:pt x="3791780" y="8243001"/>
                 </a:lnTo>
                 <a:lnTo>
-                  <a:pt x="0" y="3308268"/>
-                </a:lnTo>
-                <a:lnTo>
-                  <a:pt x="0" y="0"/>
-                </a:lnTo>
-                <a:close/>
-              </a:path>
-            </a:pathLst>
-          </a:custGeom>
-          <a:blipFill>
-            <a:blip r:embed="rId7"/>
-            <a:stretch>
-              <a:fillRect l="-14274" t="-352" r="0" b="-352"/>
-            </a:stretch>
-          </a:blipFill>
-        </p:spPr>
-      </p:sp>
-      <p:sp>
-        <p:nvSpPr>
-          <p:cNvPr name="Freeform 24" id="24"/>
-          <p:cNvSpPr/>
-          <p:nvPr/>
-        </p:nvSpPr>
-        <p:spPr>
-          <a:xfrm flipH="false" flipV="false" rot="0">
-            <a:off x="7055709" y="20175003"/>
-            <a:ext cx="2861805" cy="3280006"/>
-          </a:xfrm>
-          <a:custGeom>
-            <a:avLst/>
-            <a:gdLst/>
-            <a:ahLst/>
-            <a:cxnLst/>
-            <a:rect r="r" b="b" t="t" l="l"/>
-            <a:pathLst>
-              <a:path h="3280006" w="2861805">
-                <a:moveTo>
-                  <a:pt x="0" y="0"/>
-                </a:moveTo>
-                <a:lnTo>
-                  <a:pt x="2861805" y="0"/>
-                </a:lnTo>
-                <a:lnTo>
-                  <a:pt x="2861805" y="3280006"/>
-                </a:lnTo>
-                <a:lnTo>
-                  <a:pt x="0" y="3280006"/>
-                </a:lnTo>
-                <a:lnTo>
-                  <a:pt x="0" y="0"/>
-                </a:lnTo>
-                <a:close/>
-              </a:path>
-            </a:pathLst>
-          </a:custGeom>
-          <a:blipFill>
-            <a:blip r:embed="rId8"/>
-            <a:stretch>
-              <a:fillRect l="0" t="0" r="0" b="0"/>
-            </a:stretch>
-          </a:blipFill>
-        </p:spPr>
-      </p:sp>
-      <p:sp>
-        <p:nvSpPr>
-          <p:cNvPr name="Freeform 25" id="25"/>
-          <p:cNvSpPr/>
-          <p:nvPr/>
-        </p:nvSpPr>
-        <p:spPr>
-          <a:xfrm flipH="false" flipV="false" rot="0">
-            <a:off x="13633759" y="20020879"/>
-            <a:ext cx="2913340" cy="3626499"/>
-          </a:xfrm>
-          <a:custGeom>
-            <a:avLst/>
-            <a:gdLst/>
-            <a:ahLst/>
-            <a:cxnLst/>
-            <a:rect r="r" b="b" t="t" l="l"/>
-            <a:pathLst>
-              <a:path h="3626499" w="2913340">
-                <a:moveTo>
-                  <a:pt x="0" y="0"/>
-                </a:moveTo>
-                <a:lnTo>
-                  <a:pt x="2913340" y="0"/>
-                </a:lnTo>
-                <a:lnTo>
-                  <a:pt x="2913340" y="3626499"/>
-                </a:lnTo>
-                <a:lnTo>
-                  <a:pt x="0" y="3626499"/>
-                </a:lnTo>
-                <a:lnTo>
-                  <a:pt x="0" y="0"/>
-                </a:lnTo>
-                <a:close/>
-              </a:path>
-            </a:pathLst>
-          </a:custGeom>
-          <a:blipFill>
-            <a:blip r:embed="rId9"/>
-            <a:stretch>
-              <a:fillRect l="0" t="-4097" r="0" b="-4097"/>
-            </a:stretch>
-          </a:blipFill>
-        </p:spPr>
-      </p:sp>
-      <p:sp>
-        <p:nvSpPr>
-          <p:cNvPr name="Freeform 26" id="26"/>
-          <p:cNvSpPr/>
-          <p:nvPr/>
-        </p:nvSpPr>
-        <p:spPr>
-          <a:xfrm flipH="false" flipV="false" rot="0">
-            <a:off x="13913945" y="7547357"/>
-            <a:ext cx="6766884" cy="8759721"/>
-          </a:xfrm>
-          <a:custGeom>
-            <a:avLst/>
-            <a:gdLst/>
-            <a:ahLst/>
-            <a:cxnLst/>
-            <a:rect r="r" b="b" t="t" l="l"/>
-            <a:pathLst>
-              <a:path h="8759721" w="6766884">
-                <a:moveTo>
-                  <a:pt x="0" y="0"/>
-                </a:moveTo>
-                <a:lnTo>
-                  <a:pt x="6766884" y="0"/>
-                </a:lnTo>
-                <a:lnTo>
-                  <a:pt x="6766884" y="8759721"/>
-                </a:lnTo>
-                <a:lnTo>
-                  <a:pt x="0" y="8759721"/>
+                  <a:pt x="0" y="8243001"/>
                 </a:lnTo>
                 <a:lnTo>
                   <a:pt x="0" y="0"/>
@@ -6092,18 +6348,25 @@
               <a:fillRect l="0" t="0" r="0" b="0"/>
             </a:stretch>
           </a:blipFill>
+          <a:ln w="95250" cap="rnd">
+            <a:solidFill>
+              <a:srgbClr val="000000"/>
+            </a:solidFill>
+            <a:prstDash val="solid"/>
+            <a:round/>
+          </a:ln>
         </p:spPr>
       </p:sp>
       <p:sp>
         <p:nvSpPr>
-          <p:cNvPr name="Freeform 27" id="27"/>
+          <p:cNvPr name="Freeform 32" id="32"/>
           <p:cNvSpPr/>
           <p:nvPr/>
         </p:nvSpPr>
         <p:spPr>
           <a:xfrm flipH="false" flipV="false" rot="0">
-            <a:off x="-612454" y="7765256"/>
-            <a:ext cx="6703412" cy="8677556"/>
+            <a:off x="15388628" y="8095810"/>
+            <a:ext cx="3791780" cy="8243001"/>
           </a:xfrm>
           <a:custGeom>
             <a:avLst/>
@@ -6112,18 +6375,18 @@
             <a:cxnLst/>
             <a:rect r="r" b="b" t="t" l="l"/>
             <a:pathLst>
-              <a:path h="8677556" w="6703412">
+              <a:path h="8243001" w="3791780">
                 <a:moveTo>
                   <a:pt x="0" y="0"/>
                 </a:moveTo>
                 <a:lnTo>
-                  <a:pt x="6703412" y="0"/>
+                  <a:pt x="3791780" y="0"/>
                 </a:lnTo>
                 <a:lnTo>
-                  <a:pt x="6703412" y="8677556"/>
+                  <a:pt x="3791780" y="8243001"/>
                 </a:lnTo>
                 <a:lnTo>
-                  <a:pt x="0" y="8677556"/>
+                  <a:pt x="0" y="8243001"/>
                 </a:lnTo>
                 <a:lnTo>
                   <a:pt x="0" y="0"/>
@@ -6138,18 +6401,25 @@
               <a:fillRect l="0" t="0" r="0" b="0"/>
             </a:stretch>
           </a:blipFill>
+          <a:ln w="95250" cap="rnd">
+            <a:solidFill>
+              <a:srgbClr val="000000"/>
+            </a:solidFill>
+            <a:prstDash val="solid"/>
+            <a:round/>
+          </a:ln>
         </p:spPr>
       </p:sp>
       <p:sp>
         <p:nvSpPr>
-          <p:cNvPr name="Freeform 28" id="28"/>
+          <p:cNvPr name="Freeform 33" id="33"/>
           <p:cNvSpPr/>
           <p:nvPr/>
         </p:nvSpPr>
         <p:spPr>
           <a:xfrm flipH="false" flipV="false" rot="0">
-            <a:off x="9057156" y="7765256"/>
-            <a:ext cx="6766884" cy="8759721"/>
+            <a:off x="5661004" y="8095810"/>
+            <a:ext cx="3791780" cy="8243001"/>
           </a:xfrm>
           <a:custGeom>
             <a:avLst/>
@@ -6158,18 +6428,18 @@
             <a:cxnLst/>
             <a:rect r="r" b="b" t="t" l="l"/>
             <a:pathLst>
-              <a:path h="8759721" w="6766884">
+              <a:path h="8243001" w="3791780">
                 <a:moveTo>
                   <a:pt x="0" y="0"/>
                 </a:moveTo>
                 <a:lnTo>
-                  <a:pt x="6766884" y="0"/>
+                  <a:pt x="3791780" y="0"/>
                 </a:lnTo>
                 <a:lnTo>
-                  <a:pt x="6766884" y="8759721"/>
+                  <a:pt x="3791780" y="8243001"/>
                 </a:lnTo>
                 <a:lnTo>
-                  <a:pt x="0" y="8759721"/>
+                  <a:pt x="0" y="8243001"/>
                 </a:lnTo>
                 <a:lnTo>
                   <a:pt x="0" y="0"/>
@@ -6184,18 +6454,25 @@
               <a:fillRect l="0" t="0" r="0" b="0"/>
             </a:stretch>
           </a:blipFill>
+          <a:ln w="95250" cap="rnd">
+            <a:solidFill>
+              <a:srgbClr val="000000"/>
+            </a:solidFill>
+            <a:prstDash val="solid"/>
+            <a:round/>
+          </a:ln>
         </p:spPr>
       </p:sp>
       <p:sp>
         <p:nvSpPr>
-          <p:cNvPr name="Freeform 29" id="29"/>
+          <p:cNvPr name="Freeform 34" id="34"/>
           <p:cNvSpPr/>
           <p:nvPr/>
         </p:nvSpPr>
         <p:spPr>
           <a:xfrm flipH="false" flipV="false" rot="0">
-            <a:off x="4180863" y="7845960"/>
-            <a:ext cx="6786388" cy="8784968"/>
+            <a:off x="861842" y="7991035"/>
+            <a:ext cx="3727130" cy="8300151"/>
           </a:xfrm>
           <a:custGeom>
             <a:avLst/>
@@ -6204,18 +6481,18 @@
             <a:cxnLst/>
             <a:rect r="r" b="b" t="t" l="l"/>
             <a:pathLst>
-              <a:path h="8784968" w="6786388">
+              <a:path h="8300151" w="3727130">
                 <a:moveTo>
                   <a:pt x="0" y="0"/>
                 </a:moveTo>
                 <a:lnTo>
-                  <a:pt x="6786388" y="0"/>
+                  <a:pt x="3727131" y="0"/>
                 </a:lnTo>
                 <a:lnTo>
-                  <a:pt x="6786388" y="8784968"/>
+                  <a:pt x="3727131" y="8300151"/>
                 </a:lnTo>
                 <a:lnTo>
-                  <a:pt x="0" y="8784968"/>
+                  <a:pt x="0" y="8300151"/>
                 </a:lnTo>
                 <a:lnTo>
                   <a:pt x="0" y="0"/>
@@ -6227,21 +6504,28 @@
           <a:blipFill>
             <a:blip r:embed="rId13"/>
             <a:stretch>
-              <a:fillRect l="0" t="0" r="0" b="0"/>
+              <a:fillRect l="0" t="0" r="-2439" b="0"/>
             </a:stretch>
           </a:blipFill>
+          <a:ln w="95250" cap="rnd">
+            <a:solidFill>
+              <a:srgbClr val="000000"/>
+            </a:solidFill>
+            <a:prstDash val="solid"/>
+            <a:round/>
+          </a:ln>
         </p:spPr>
       </p:sp>
       <p:sp>
         <p:nvSpPr>
-          <p:cNvPr name="TextBox 30" id="30"/>
+          <p:cNvPr name="TextBox 35" id="35"/>
           <p:cNvSpPr txBox="true"/>
           <p:nvPr/>
         </p:nvSpPr>
         <p:spPr>
           <a:xfrm rot="0">
-            <a:off x="868924" y="4638342"/>
-            <a:ext cx="7543646" cy="1750709"/>
+            <a:off x="719637" y="4628817"/>
+            <a:ext cx="7842219" cy="1838124"/>
           </a:xfrm>
           <a:prstGeom prst="rect">
             <a:avLst/>
@@ -6255,11 +6539,11 @@
           <a:p>
             <a:pPr algn="ctr">
               <a:lnSpc>
-                <a:spcPts val="7079"/>
+                <a:spcPts val="7359"/>
               </a:lnSpc>
             </a:pPr>
             <a:r>
-              <a:rPr lang="en-US" b="true" sz="5056" spc="-126">
+              <a:rPr lang="en-US" b="true" sz="5256" spc="-131">
                 <a:solidFill>
                   <a:srgbClr val="3E7136"/>
                 </a:solidFill>
@@ -6271,7 +6555,7 @@
               <a:t>small businesses </a:t>
             </a:r>
             <a:r>
-              <a:rPr lang="en-US" b="true" sz="5056" i="true" spc="-126">
+              <a:rPr lang="en-US" b="true" sz="5256" i="true" spc="-131">
                 <a:solidFill>
                   <a:srgbClr val="3E7136"/>
                 </a:solidFill>
@@ -6283,7 +6567,7 @@
               <a:t>together</a:t>
             </a:r>
             <a:r>
-              <a:rPr lang="en-US" b="true" sz="5056" spc="-126">
+              <a:rPr lang="en-US" b="true" sz="5256" spc="-131">
                 <a:solidFill>
                   <a:srgbClr val="3E7136"/>
                 </a:solidFill>
@@ -6298,14 +6582,14 @@
           <a:p>
             <a:pPr algn="ctr">
               <a:lnSpc>
-                <a:spcPts val="7079"/>
+                <a:spcPts val="7359"/>
               </a:lnSpc>
               <a:spcBef>
                 <a:spcPct val="0"/>
               </a:spcBef>
             </a:pPr>
             <a:r>
-              <a:rPr lang="en-US" sz="5056" spc="-126">
+              <a:rPr lang="en-US" sz="5256" spc="-131">
                 <a:solidFill>
                   <a:srgbClr val="3E7136"/>
                 </a:solidFill>
@@ -6321,7 +6605,7 @@
       </p:sp>
       <p:sp>
         <p:nvSpPr>
-          <p:cNvPr name="TextBox 31" id="31"/>
+          <p:cNvPr name="TextBox 36" id="36"/>
           <p:cNvSpPr txBox="true"/>
           <p:nvPr/>
         </p:nvSpPr>
@@ -6365,13 +6649,13 @@
       </p:sp>
       <p:sp>
         <p:nvSpPr>
-          <p:cNvPr name="TextBox 32" id="32"/>
+          <p:cNvPr name="TextBox 37" id="37"/>
           <p:cNvSpPr txBox="true"/>
           <p:nvPr/>
         </p:nvSpPr>
         <p:spPr>
           <a:xfrm rot="0">
-            <a:off x="8921812" y="1271609"/>
+            <a:off x="9352158" y="1271609"/>
             <a:ext cx="4191916" cy="1203288"/>
           </a:xfrm>
           <a:prstGeom prst="rect">
@@ -6409,13 +6693,13 @@
       </p:sp>
       <p:sp>
         <p:nvSpPr>
-          <p:cNvPr name="TextBox 33" id="33"/>
+          <p:cNvPr name="TextBox 38" id="38"/>
           <p:cNvSpPr txBox="true"/>
           <p:nvPr/>
         </p:nvSpPr>
         <p:spPr>
           <a:xfrm rot="0">
-            <a:off x="8921812" y="2752700"/>
+            <a:off x="9352158" y="2752700"/>
             <a:ext cx="4329640" cy="2508313"/>
           </a:xfrm>
           <a:prstGeom prst="rect">
@@ -6428,13 +6712,13 @@
           </a:bodyPr>
           <a:lstStyle/>
           <a:p>
-            <a:pPr algn="l">
+            <a:pPr algn="ctr">
               <a:lnSpc>
                 <a:spcPts val="4016"/>
               </a:lnSpc>
             </a:pPr>
             <a:r>
-              <a:rPr lang="en-US" sz="2868" b="true">
+              <a:rPr lang="en-US" b="true" sz="2868">
                 <a:solidFill>
                   <a:srgbClr val="A36817"/>
                 </a:solidFill>
@@ -6458,7 +6742,7 @@
               <a:t>to</a:t>
             </a:r>
             <a:r>
-              <a:rPr lang="en-US" sz="2868" b="true">
+              <a:rPr lang="en-US" b="true" sz="2868">
                 <a:solidFill>
                   <a:srgbClr val="A36817"/>
                 </a:solidFill>
@@ -6482,7 +6766,7 @@
               <a:t>ge</a:t>
             </a:r>
             <a:r>
-              <a:rPr lang="en-US" sz="2868" b="true">
+              <a:rPr lang="en-US" b="true" sz="2868">
                 <a:solidFill>
                   <a:srgbClr val="A36817"/>
                 </a:solidFill>
@@ -6506,7 +6790,7 @@
               <a:t>er</a:t>
             </a:r>
             <a:r>
-              <a:rPr lang="en-US" sz="2868" b="true">
+              <a:rPr lang="en-US" b="true" sz="2868">
                 <a:solidFill>
                   <a:srgbClr val="A36817"/>
                 </a:solidFill>
@@ -6522,7 +6806,7 @@
       </p:sp>
       <p:sp>
         <p:nvSpPr>
-          <p:cNvPr name="TextBox 34" id="34"/>
+          <p:cNvPr name="TextBox 39" id="39"/>
           <p:cNvSpPr txBox="true"/>
           <p:nvPr/>
         </p:nvSpPr>
@@ -6541,7 +6825,7 @@
           </a:bodyPr>
           <a:lstStyle/>
           <a:p>
-            <a:pPr algn="l">
+            <a:pPr algn="ctr">
               <a:lnSpc>
                 <a:spcPts val="4016"/>
               </a:lnSpc>
@@ -6566,13 +6850,13 @@
       </p:sp>
       <p:sp>
         <p:nvSpPr>
-          <p:cNvPr name="TextBox 35" id="35"/>
+          <p:cNvPr name="TextBox 40" id="40"/>
           <p:cNvSpPr txBox="true"/>
           <p:nvPr/>
         </p:nvSpPr>
         <p:spPr>
           <a:xfrm rot="0">
-            <a:off x="5977651" y="17453841"/>
+            <a:off x="6010304" y="17261125"/>
             <a:ext cx="7845479" cy="1203288"/>
           </a:xfrm>
           <a:prstGeom prst="rect">
@@ -6610,268 +6894,7 @@
       </p:sp>
       <p:sp>
         <p:nvSpPr>
-          <p:cNvPr name="TextBox 36" id="36"/>
-          <p:cNvSpPr txBox="true"/>
-          <p:nvPr/>
-        </p:nvSpPr>
-        <p:spPr>
-          <a:xfrm rot="0">
-            <a:off x="561144" y="19422427"/>
-            <a:ext cx="2710309" cy="504825"/>
-          </a:xfrm>
-          <a:prstGeom prst="rect">
-            <a:avLst/>
-          </a:prstGeom>
-        </p:spPr>
-        <p:txBody>
-          <a:bodyPr anchor="t" rtlCol="false" tIns="0" lIns="0" bIns="0" rIns="0">
-            <a:spAutoFit/>
-          </a:bodyPr>
-          <a:lstStyle/>
-          <a:p>
-            <a:pPr algn="ctr">
-              <a:lnSpc>
-                <a:spcPts val="4199"/>
-              </a:lnSpc>
-              <a:spcBef>
-                <a:spcPct val="0"/>
-              </a:spcBef>
-            </a:pPr>
-            <a:r>
-              <a:rPr lang="en-US" b="true" sz="2999" spc="-74">
-                <a:solidFill>
-                  <a:srgbClr val="A36817"/>
-                </a:solidFill>
-                <a:latin typeface="Glacial Indifference Bold"/>
-                <a:ea typeface="Glacial Indifference Bold"/>
-                <a:cs typeface="Glacial Indifference Bold"/>
-                <a:sym typeface="Glacial Indifference Bold"/>
-              </a:rPr>
-              <a:t>Needfinding</a:t>
-            </a:r>
-          </a:p>
-        </p:txBody>
-      </p:sp>
-      <p:sp>
-        <p:nvSpPr>
-          <p:cNvPr name="TextBox 37" id="37"/>
-          <p:cNvSpPr txBox="true"/>
-          <p:nvPr/>
-        </p:nvSpPr>
-        <p:spPr>
-          <a:xfrm rot="0">
-            <a:off x="3572886" y="19422427"/>
-            <a:ext cx="3045033" cy="504825"/>
-          </a:xfrm>
-          <a:prstGeom prst="rect">
-            <a:avLst/>
-          </a:prstGeom>
-        </p:spPr>
-        <p:txBody>
-          <a:bodyPr anchor="t" rtlCol="false" tIns="0" lIns="0" bIns="0" rIns="0">
-            <a:spAutoFit/>
-          </a:bodyPr>
-          <a:lstStyle/>
-          <a:p>
-            <a:pPr algn="ctr">
-              <a:lnSpc>
-                <a:spcPts val="4199"/>
-              </a:lnSpc>
-              <a:spcBef>
-                <a:spcPct val="0"/>
-              </a:spcBef>
-            </a:pPr>
-            <a:r>
-              <a:rPr lang="en-US" b="true" sz="2999" spc="-74">
-                <a:solidFill>
-                  <a:srgbClr val="A36817"/>
-                </a:solidFill>
-                <a:latin typeface="Glacial Indifference Bold"/>
-                <a:ea typeface="Glacial Indifference Bold"/>
-                <a:cs typeface="Glacial Indifference Bold"/>
-                <a:sym typeface="Glacial Indifference Bold"/>
-              </a:rPr>
-              <a:t>How Might We...</a:t>
-            </a:r>
-          </a:p>
-        </p:txBody>
-      </p:sp>
-      <p:sp>
-        <p:nvSpPr>
-          <p:cNvPr name="TextBox 38" id="38"/>
-          <p:cNvSpPr txBox="true"/>
-          <p:nvPr/>
-        </p:nvSpPr>
-        <p:spPr>
-          <a:xfrm rot="0">
-            <a:off x="6919352" y="19418617"/>
-            <a:ext cx="3134519" cy="512445"/>
-          </a:xfrm>
-          <a:prstGeom prst="rect">
-            <a:avLst/>
-          </a:prstGeom>
-        </p:spPr>
-        <p:txBody>
-          <a:bodyPr anchor="t" rtlCol="false" tIns="0" lIns="0" bIns="0" rIns="0">
-            <a:spAutoFit/>
-          </a:bodyPr>
-          <a:lstStyle/>
-          <a:p>
-            <a:pPr algn="ctr">
-              <a:lnSpc>
-                <a:spcPts val="4139"/>
-              </a:lnSpc>
-            </a:pPr>
-            <a:r>
-              <a:rPr lang="en-US" b="true" sz="2999" spc="-188">
-                <a:solidFill>
-                  <a:srgbClr val="A36817"/>
-                </a:solidFill>
-                <a:latin typeface="Glacial Indifference Bold"/>
-                <a:ea typeface="Glacial Indifference Bold"/>
-                <a:cs typeface="Glacial Indifference Bold"/>
-                <a:sym typeface="Glacial Indifference Bold"/>
-              </a:rPr>
-              <a:t>Diverse Realizations</a:t>
-            </a:r>
-          </a:p>
-        </p:txBody>
-      </p:sp>
-      <p:sp>
-        <p:nvSpPr>
-          <p:cNvPr name="TextBox 39" id="39"/>
-          <p:cNvSpPr txBox="true"/>
-          <p:nvPr/>
-        </p:nvSpPr>
-        <p:spPr>
-          <a:xfrm rot="0">
-            <a:off x="10355304" y="19422427"/>
-            <a:ext cx="3198733" cy="504825"/>
-          </a:xfrm>
-          <a:prstGeom prst="rect">
-            <a:avLst/>
-          </a:prstGeom>
-        </p:spPr>
-        <p:txBody>
-          <a:bodyPr anchor="t" rtlCol="false" tIns="0" lIns="0" bIns="0" rIns="0">
-            <a:spAutoFit/>
-          </a:bodyPr>
-          <a:lstStyle/>
-          <a:p>
-            <a:pPr algn="ctr">
-              <a:lnSpc>
-                <a:spcPts val="4199"/>
-              </a:lnSpc>
-              <a:spcBef>
-                <a:spcPct val="0"/>
-              </a:spcBef>
-            </a:pPr>
-            <a:r>
-              <a:rPr lang="en-US" b="true" sz="2999" spc="-74">
-                <a:solidFill>
-                  <a:srgbClr val="A36817"/>
-                </a:solidFill>
-                <a:latin typeface="Glacial Indifference Bold"/>
-                <a:ea typeface="Glacial Indifference Bold"/>
-                <a:cs typeface="Glacial Indifference Bold"/>
-                <a:sym typeface="Glacial Indifference Bold"/>
-              </a:rPr>
-              <a:t>Low-fi Prototype</a:t>
-            </a:r>
-          </a:p>
-        </p:txBody>
-      </p:sp>
-      <p:sp>
-        <p:nvSpPr>
-          <p:cNvPr name="TextBox 40" id="40"/>
-          <p:cNvSpPr txBox="true"/>
-          <p:nvPr/>
-        </p:nvSpPr>
-        <p:spPr>
-          <a:xfrm rot="0">
-            <a:off x="13855470" y="19411278"/>
-            <a:ext cx="2469919" cy="504825"/>
-          </a:xfrm>
-          <a:prstGeom prst="rect">
-            <a:avLst/>
-          </a:prstGeom>
-        </p:spPr>
-        <p:txBody>
-          <a:bodyPr anchor="t" rtlCol="false" tIns="0" lIns="0" bIns="0" rIns="0">
-            <a:spAutoFit/>
-          </a:bodyPr>
-          <a:lstStyle/>
-          <a:p>
-            <a:pPr algn="ctr">
-              <a:lnSpc>
-                <a:spcPts val="4199"/>
-              </a:lnSpc>
-              <a:spcBef>
-                <a:spcPct val="0"/>
-              </a:spcBef>
-            </a:pPr>
-            <a:r>
-              <a:rPr lang="en-US" b="true" sz="2999" spc="-227">
-                <a:solidFill>
-                  <a:srgbClr val="A36817"/>
-                </a:solidFill>
-                <a:latin typeface="Glacial Indifference Bold"/>
-                <a:ea typeface="Glacial Indifference Bold"/>
-                <a:cs typeface="Glacial Indifference Bold"/>
-                <a:sym typeface="Glacial Indifference Bold"/>
-              </a:rPr>
-              <a:t>Usability Testing</a:t>
-            </a:r>
-          </a:p>
-        </p:txBody>
-      </p:sp>
-      <p:sp>
-        <p:nvSpPr>
           <p:cNvPr name="TextBox 41" id="41"/>
-          <p:cNvSpPr txBox="true"/>
-          <p:nvPr/>
-        </p:nvSpPr>
-        <p:spPr>
-          <a:xfrm rot="0">
-            <a:off x="16626822" y="19411278"/>
-            <a:ext cx="2469919" cy="504825"/>
-          </a:xfrm>
-          <a:prstGeom prst="rect">
-            <a:avLst/>
-          </a:prstGeom>
-        </p:spPr>
-        <p:txBody>
-          <a:bodyPr anchor="t" rtlCol="false" tIns="0" lIns="0" bIns="0" rIns="0">
-            <a:spAutoFit/>
-          </a:bodyPr>
-          <a:lstStyle/>
-          <a:p>
-            <a:pPr algn="ctr">
-              <a:lnSpc>
-                <a:spcPts val="4199"/>
-              </a:lnSpc>
-              <a:spcBef>
-                <a:spcPct val="0"/>
-              </a:spcBef>
-            </a:pPr>
-            <a:r>
-              <a:rPr lang="en-US" b="true" sz="2999" spc="-290">
-                <a:solidFill>
-                  <a:srgbClr val="A36817"/>
-                </a:solidFill>
-                <a:latin typeface="Glacial Indifference Bold"/>
-                <a:ea typeface="Glacial Indifference Bold"/>
-                <a:cs typeface="Glacial Indifference Bold"/>
-                <a:sym typeface="Glacial Indifference Bold"/>
-              </a:rPr>
-              <a:t>Med-Fi Prototype</a:t>
-            </a:r>
-          </a:p>
-        </p:txBody>
-      </p:sp>
-      <p:sp>
-        <p:nvSpPr>
-          <p:cNvPr name="TextBox 42" id="42"/>
           <p:cNvSpPr txBox="true"/>
           <p:nvPr/>
         </p:nvSpPr>
@@ -6915,13 +6938,13 @@
       </p:sp>
       <p:sp>
         <p:nvSpPr>
-          <p:cNvPr name="TextBox 43" id="43"/>
+          <p:cNvPr name="TextBox 42" id="42"/>
           <p:cNvSpPr txBox="true"/>
           <p:nvPr/>
         </p:nvSpPr>
         <p:spPr>
           <a:xfrm rot="0">
-            <a:off x="1400232" y="16573778"/>
+            <a:off x="1370253" y="16338811"/>
             <a:ext cx="2710309" cy="504825"/>
           </a:xfrm>
           <a:prstGeom prst="rect">
@@ -6959,13 +6982,13 @@
       </p:sp>
       <p:sp>
         <p:nvSpPr>
-          <p:cNvPr name="TextBox 44" id="44"/>
+          <p:cNvPr name="TextBox 43" id="43"/>
           <p:cNvSpPr txBox="true"/>
           <p:nvPr/>
         </p:nvSpPr>
         <p:spPr>
           <a:xfrm rot="0">
-            <a:off x="6090958" y="16573778"/>
+            <a:off x="5841450" y="16338811"/>
             <a:ext cx="3430887" cy="504825"/>
           </a:xfrm>
           <a:prstGeom prst="rect">
@@ -7003,13 +7026,13 @@
       </p:sp>
       <p:sp>
         <p:nvSpPr>
-          <p:cNvPr name="TextBox 45" id="45"/>
+          <p:cNvPr name="TextBox 44" id="44"/>
           <p:cNvSpPr txBox="true"/>
           <p:nvPr/>
         </p:nvSpPr>
         <p:spPr>
           <a:xfrm rot="0">
-            <a:off x="11502263" y="16573778"/>
+            <a:off x="11076775" y="16338811"/>
             <a:ext cx="2710309" cy="504825"/>
           </a:xfrm>
           <a:prstGeom prst="rect">
@@ -7047,13 +7070,13 @@
       </p:sp>
       <p:sp>
         <p:nvSpPr>
-          <p:cNvPr name="TextBox 46" id="46"/>
+          <p:cNvPr name="TextBox 45" id="45"/>
           <p:cNvSpPr txBox="true"/>
           <p:nvPr/>
         </p:nvSpPr>
         <p:spPr>
           <a:xfrm rot="0">
-            <a:off x="16192989" y="16573778"/>
+            <a:off x="15929363" y="16338811"/>
             <a:ext cx="2710309" cy="504825"/>
           </a:xfrm>
           <a:prstGeom prst="rect">
